--- a/figures/ppt/mdrnn.pptx
+++ b/figures/ppt/mdrnn.pptx
@@ -104,6 +104,11 @@
       </a:defRPr>
     </a:lvl9pPr>
   </p:defaultTextStyle>
+  <p:extLst>
+    <p:ext uri="{EFAFB233-063F-42B5-8137-9DF3F51BA10A}">
+      <p15:sldGuideLst xmlns:p15="http://schemas.microsoft.com/office/powerpoint/2012/main"/>
+    </p:ext>
+  </p:extLst>
 </p:presentation>
 </file>
 
@@ -256,7 +261,7 @@
           <a:p>
             <a:fld id="{A01A795C-9E21-405F-A2DB-86F6AC263DBD}" type="datetimeFigureOut">
               <a:rPr lang="en-AU" smtClean="0"/>
-              <a:t>21/05/2025</a:t>
+              <a:t>22/05/2025</a:t>
             </a:fld>
             <a:endParaRPr lang="en-AU"/>
           </a:p>
@@ -456,7 +461,7 @@
           <a:p>
             <a:fld id="{A01A795C-9E21-405F-A2DB-86F6AC263DBD}" type="datetimeFigureOut">
               <a:rPr lang="en-AU" smtClean="0"/>
-              <a:t>21/05/2025</a:t>
+              <a:t>22/05/2025</a:t>
             </a:fld>
             <a:endParaRPr lang="en-AU"/>
           </a:p>
@@ -666,7 +671,7 @@
           <a:p>
             <a:fld id="{A01A795C-9E21-405F-A2DB-86F6AC263DBD}" type="datetimeFigureOut">
               <a:rPr lang="en-AU" smtClean="0"/>
-              <a:t>21/05/2025</a:t>
+              <a:t>22/05/2025</a:t>
             </a:fld>
             <a:endParaRPr lang="en-AU"/>
           </a:p>
@@ -866,7 +871,7 @@
           <a:p>
             <a:fld id="{A01A795C-9E21-405F-A2DB-86F6AC263DBD}" type="datetimeFigureOut">
               <a:rPr lang="en-AU" smtClean="0"/>
-              <a:t>21/05/2025</a:t>
+              <a:t>22/05/2025</a:t>
             </a:fld>
             <a:endParaRPr lang="en-AU"/>
           </a:p>
@@ -1142,7 +1147,7 @@
           <a:p>
             <a:fld id="{A01A795C-9E21-405F-A2DB-86F6AC263DBD}" type="datetimeFigureOut">
               <a:rPr lang="en-AU" smtClean="0"/>
-              <a:t>21/05/2025</a:t>
+              <a:t>22/05/2025</a:t>
             </a:fld>
             <a:endParaRPr lang="en-AU"/>
           </a:p>
@@ -1410,7 +1415,7 @@
           <a:p>
             <a:fld id="{A01A795C-9E21-405F-A2DB-86F6AC263DBD}" type="datetimeFigureOut">
               <a:rPr lang="en-AU" smtClean="0"/>
-              <a:t>21/05/2025</a:t>
+              <a:t>22/05/2025</a:t>
             </a:fld>
             <a:endParaRPr lang="en-AU"/>
           </a:p>
@@ -1825,7 +1830,7 @@
           <a:p>
             <a:fld id="{A01A795C-9E21-405F-A2DB-86F6AC263DBD}" type="datetimeFigureOut">
               <a:rPr lang="en-AU" smtClean="0"/>
-              <a:t>21/05/2025</a:t>
+              <a:t>22/05/2025</a:t>
             </a:fld>
             <a:endParaRPr lang="en-AU"/>
           </a:p>
@@ -1967,7 +1972,7 @@
           <a:p>
             <a:fld id="{A01A795C-9E21-405F-A2DB-86F6AC263DBD}" type="datetimeFigureOut">
               <a:rPr lang="en-AU" smtClean="0"/>
-              <a:t>21/05/2025</a:t>
+              <a:t>22/05/2025</a:t>
             </a:fld>
             <a:endParaRPr lang="en-AU"/>
           </a:p>
@@ -2080,7 +2085,7 @@
           <a:p>
             <a:fld id="{A01A795C-9E21-405F-A2DB-86F6AC263DBD}" type="datetimeFigureOut">
               <a:rPr lang="en-AU" smtClean="0"/>
-              <a:t>21/05/2025</a:t>
+              <a:t>22/05/2025</a:t>
             </a:fld>
             <a:endParaRPr lang="en-AU"/>
           </a:p>
@@ -2393,7 +2398,7 @@
           <a:p>
             <a:fld id="{A01A795C-9E21-405F-A2DB-86F6AC263DBD}" type="datetimeFigureOut">
               <a:rPr lang="en-AU" smtClean="0"/>
-              <a:t>21/05/2025</a:t>
+              <a:t>22/05/2025</a:t>
             </a:fld>
             <a:endParaRPr lang="en-AU"/>
           </a:p>
@@ -2682,7 +2687,7 @@
           <a:p>
             <a:fld id="{A01A795C-9E21-405F-A2DB-86F6AC263DBD}" type="datetimeFigureOut">
               <a:rPr lang="en-AU" smtClean="0"/>
-              <a:t>21/05/2025</a:t>
+              <a:t>22/05/2025</a:t>
             </a:fld>
             <a:endParaRPr lang="en-AU"/>
           </a:p>
@@ -2925,7 +2930,7 @@
           <a:p>
             <a:fld id="{A01A795C-9E21-405F-A2DB-86F6AC263DBD}" type="datetimeFigureOut">
               <a:rPr lang="en-AU" smtClean="0"/>
-              <a:t>21/05/2025</a:t>
+              <a:t>22/05/2025</a:t>
             </a:fld>
             <a:endParaRPr lang="en-AU"/>
           </a:p>
@@ -3366,9 +3371,7 @@
           </a:prstGeom>
           <a:ln w="50800">
             <a:solidFill>
-              <a:schemeClr val="tx2">
-                <a:lumMod val="90000"/>
-                <a:lumOff val="10000"/>
+              <a:schemeClr val="tx1">
                 <a:alpha val="50000"/>
               </a:schemeClr>
             </a:solidFill>
@@ -3529,9 +3532,7 @@
           </a:prstGeom>
           <a:ln w="50800">
             <a:solidFill>
-              <a:schemeClr val="tx2">
-                <a:lumMod val="90000"/>
-                <a:lumOff val="10000"/>
+              <a:schemeClr val="tx1">
                 <a:alpha val="50000"/>
               </a:schemeClr>
             </a:solidFill>
@@ -3579,9 +3580,7 @@
           </a:prstGeom>
           <a:ln w="50800">
             <a:solidFill>
-              <a:schemeClr val="tx2">
-                <a:lumMod val="90000"/>
-                <a:lumOff val="10000"/>
+              <a:schemeClr val="tx1">
                 <a:alpha val="50000"/>
               </a:schemeClr>
             </a:solidFill>
@@ -3627,9 +3626,7 @@
           </a:prstGeom>
           <a:ln w="50800">
             <a:solidFill>
-              <a:schemeClr val="tx2">
-                <a:lumMod val="90000"/>
-                <a:lumOff val="10000"/>
+              <a:schemeClr val="tx1">
                 <a:alpha val="50000"/>
               </a:schemeClr>
             </a:solidFill>
@@ -3675,9 +3672,7 @@
           </a:prstGeom>
           <a:ln w="50800">
             <a:solidFill>
-              <a:schemeClr val="tx2">
-                <a:lumMod val="90000"/>
-                <a:lumOff val="10000"/>
+              <a:schemeClr val="tx1">
                 <a:alpha val="50000"/>
               </a:schemeClr>
             </a:solidFill>
@@ -3724,9 +3719,7 @@
           </a:prstGeom>
           <a:ln w="50800">
             <a:solidFill>
-              <a:schemeClr val="tx2">
-                <a:lumMod val="90000"/>
-                <a:lumOff val="10000"/>
+              <a:schemeClr val="tx1">
                 <a:alpha val="50000"/>
               </a:schemeClr>
             </a:solidFill>
@@ -3773,9 +3766,7 @@
           </a:prstGeom>
           <a:ln w="50800">
             <a:solidFill>
-              <a:schemeClr val="tx2">
-                <a:lumMod val="90000"/>
-                <a:lumOff val="10000"/>
+              <a:schemeClr val="tx1">
                 <a:alpha val="50000"/>
               </a:schemeClr>
             </a:solidFill>
@@ -3822,9 +3813,7 @@
           </a:prstGeom>
           <a:ln w="50800">
             <a:solidFill>
-              <a:schemeClr val="tx2">
-                <a:lumMod val="90000"/>
-                <a:lumOff val="10000"/>
+              <a:schemeClr val="tx1">
                 <a:alpha val="50000"/>
               </a:schemeClr>
             </a:solidFill>
@@ -3871,9 +3860,7 @@
           </a:prstGeom>
           <a:ln w="50800">
             <a:solidFill>
-              <a:schemeClr val="tx2">
-                <a:lumMod val="90000"/>
-                <a:lumOff val="10000"/>
+              <a:schemeClr val="tx1">
                 <a:alpha val="50000"/>
               </a:schemeClr>
             </a:solidFill>
@@ -3933,10 +3920,10 @@
       </p:pic>
       <p:pic>
         <p:nvPicPr>
-          <p:cNvPr id="259" name="Graphic 258">
-            <a:extLst>
-              <a:ext uri="{FF2B5EF4-FFF2-40B4-BE49-F238E27FC236}">
-                <a16:creationId xmlns:a16="http://schemas.microsoft.com/office/drawing/2014/main" id="{79CFDAF0-81E7-FA77-65B6-A7AF0133C621}"/>
+          <p:cNvPr id="260" name="Graphic 259">
+            <a:extLst>
+              <a:ext uri="{FF2B5EF4-FFF2-40B4-BE49-F238E27FC236}">
+                <a16:creationId xmlns:a16="http://schemas.microsoft.com/office/drawing/2014/main" id="{CE280B3A-A7E9-F78B-BEDA-42CD43F7EA9D}"/>
               </a:ext>
             </a:extLst>
           </p:cNvPr>
@@ -3959,8 +3946,8 @@
         </p:blipFill>
         <p:spPr>
           <a:xfrm>
-            <a:off x="8220118" y="2521804"/>
-            <a:ext cx="252088" cy="705844"/>
+            <a:off x="6958658" y="2954155"/>
+            <a:ext cx="471242" cy="215007"/>
           </a:xfrm>
           <a:prstGeom prst="rect">
             <a:avLst/>
@@ -3969,10 +3956,10 @@
       </p:pic>
       <p:pic>
         <p:nvPicPr>
-          <p:cNvPr id="260" name="Graphic 259">
-            <a:extLst>
-              <a:ext uri="{FF2B5EF4-FFF2-40B4-BE49-F238E27FC236}">
-                <a16:creationId xmlns:a16="http://schemas.microsoft.com/office/drawing/2014/main" id="{CE280B3A-A7E9-F78B-BEDA-42CD43F7EA9D}"/>
+          <p:cNvPr id="261" name="Graphic 260">
+            <a:extLst>
+              <a:ext uri="{FF2B5EF4-FFF2-40B4-BE49-F238E27FC236}">
+                <a16:creationId xmlns:a16="http://schemas.microsoft.com/office/drawing/2014/main" id="{AAEDEE27-9485-7F0E-377D-6BD34C057230}"/>
               </a:ext>
             </a:extLst>
           </p:cNvPr>
@@ -3995,42 +3982,6 @@
         </p:blipFill>
         <p:spPr>
           <a:xfrm>
-            <a:off x="6958658" y="2954155"/>
-            <a:ext cx="471242" cy="215007"/>
-          </a:xfrm>
-          <a:prstGeom prst="rect">
-            <a:avLst/>
-          </a:prstGeom>
-        </p:spPr>
-      </p:pic>
-      <p:pic>
-        <p:nvPicPr>
-          <p:cNvPr id="261" name="Graphic 260">
-            <a:extLst>
-              <a:ext uri="{FF2B5EF4-FFF2-40B4-BE49-F238E27FC236}">
-                <a16:creationId xmlns:a16="http://schemas.microsoft.com/office/drawing/2014/main" id="{AAEDEE27-9485-7F0E-377D-6BD34C057230}"/>
-              </a:ext>
-            </a:extLst>
-          </p:cNvPr>
-          <p:cNvPicPr>
-            <a:picLocks noChangeAspect="1"/>
-          </p:cNvPicPr>
-          <p:nvPr/>
-        </p:nvPicPr>
-        <p:blipFill>
-          <a:blip r:embed="rId8">
-            <a:extLst>
-              <a:ext uri="{96DAC541-7B7A-43D3-8B79-37D633B846F1}">
-                <asvg:svgBlip xmlns:asvg="http://schemas.microsoft.com/office/drawing/2016/SVG/main" r:embed="rId9"/>
-              </a:ext>
-            </a:extLst>
-          </a:blip>
-          <a:stretch>
-            <a:fillRect/>
-          </a:stretch>
-        </p:blipFill>
-        <p:spPr>
-          <a:xfrm>
             <a:off x="7499064" y="2537394"/>
             <a:ext cx="766414" cy="766414"/>
           </a:xfrm>
@@ -4068,14 +4019,7 @@
           <a:lstStyle/>
           <a:p>
             <a:r>
-              <a:rPr lang="en-AU" sz="2000" b="1" dirty="0">
-                <a:solidFill>
-                  <a:schemeClr val="tx2">
-                    <a:lumMod val="90000"/>
-                    <a:lumOff val="10000"/>
-                  </a:schemeClr>
-                </a:solidFill>
-              </a:rPr>
+              <a:rPr lang="en-AU" sz="2000" b="1" dirty="0"/>
               <a:t>Gaussian Mixture Model</a:t>
             </a:r>
           </a:p>
@@ -4105,9 +4049,7 @@
           </a:prstGeom>
           <a:ln w="50800">
             <a:solidFill>
-              <a:schemeClr val="tx2">
-                <a:lumMod val="90000"/>
-                <a:lumOff val="10000"/>
+              <a:schemeClr val="tx1">
                 <a:alpha val="50000"/>
               </a:schemeClr>
             </a:solidFill>
@@ -4153,9 +4095,7 @@
           </a:prstGeom>
           <a:ln w="50800">
             <a:solidFill>
-              <a:schemeClr val="tx2">
-                <a:lumMod val="90000"/>
-                <a:lumOff val="10000"/>
+              <a:schemeClr val="tx1">
                 <a:alpha val="50000"/>
               </a:schemeClr>
             </a:solidFill>
@@ -4201,9 +4141,7 @@
           </a:prstGeom>
           <a:ln w="50800">
             <a:solidFill>
-              <a:schemeClr val="tx2">
-                <a:lumMod val="90000"/>
-                <a:lumOff val="10000"/>
+              <a:schemeClr val="tx1">
                 <a:alpha val="50000"/>
               </a:schemeClr>
             </a:solidFill>
@@ -4249,9 +4187,7 @@
           </a:prstGeom>
           <a:ln w="50800">
             <a:solidFill>
-              <a:schemeClr val="tx2">
-                <a:lumMod val="90000"/>
-                <a:lumOff val="10000"/>
+              <a:schemeClr val="tx1">
                 <a:alpha val="50000"/>
               </a:schemeClr>
             </a:solidFill>
@@ -4297,9 +4233,7 @@
           </a:prstGeom>
           <a:ln w="50800">
             <a:solidFill>
-              <a:schemeClr val="tx2">
-                <a:lumMod val="90000"/>
-                <a:lumOff val="10000"/>
+              <a:schemeClr val="tx1">
                 <a:alpha val="50000"/>
               </a:schemeClr>
             </a:solidFill>
@@ -4345,9 +4279,7 @@
           </a:prstGeom>
           <a:ln w="50800">
             <a:solidFill>
-              <a:schemeClr val="tx2">
-                <a:lumMod val="90000"/>
-                <a:lumOff val="10000"/>
+              <a:schemeClr val="tx1">
                 <a:alpha val="50000"/>
               </a:schemeClr>
             </a:solidFill>
@@ -4507,10 +4439,10 @@
           <p:nvPr/>
         </p:nvPicPr>
         <p:blipFill>
-          <a:blip r:embed="rId10">
+          <a:blip r:embed="rId8">
             <a:extLst>
               <a:ext uri="{96DAC541-7B7A-43D3-8B79-37D633B846F1}">
-                <asvg:svgBlip xmlns:asvg="http://schemas.microsoft.com/office/drawing/2016/SVG/main" r:embed="rId11"/>
+                <asvg:svgBlip xmlns:asvg="http://schemas.microsoft.com/office/drawing/2016/SVG/main" r:embed="rId9"/>
               </a:ext>
             </a:extLst>
           </a:blip>
@@ -4558,28 +4490,14 @@
           <a:p>
             <a:pPr algn="ctr"/>
             <a:r>
-              <a:rPr lang="en-AU" sz="2000" b="1" dirty="0">
-                <a:solidFill>
-                  <a:schemeClr val="tx2">
-                    <a:lumMod val="90000"/>
-                    <a:lumOff val="10000"/>
-                  </a:schemeClr>
-                </a:solidFill>
-              </a:rPr>
+              <a:rPr lang="en-AU" sz="2000" b="1" dirty="0"/>
               <a:t>Stochastic</a:t>
             </a:r>
           </a:p>
           <a:p>
             <a:pPr algn="ctr"/>
             <a:r>
-              <a:rPr lang="en-AU" sz="2000" b="1" dirty="0">
-                <a:solidFill>
-                  <a:schemeClr val="tx2">
-                    <a:lumMod val="90000"/>
-                    <a:lumOff val="10000"/>
-                  </a:schemeClr>
-                </a:solidFill>
-              </a:rPr>
+              <a:rPr lang="en-AU" sz="2000" b="1" dirty="0"/>
               <a:t>Sampling</a:t>
             </a:r>
           </a:p>
@@ -4591,6 +4509,337 @@
             <a:extLst>
               <a:ext uri="{FF2B5EF4-FFF2-40B4-BE49-F238E27FC236}">
                 <a16:creationId xmlns:a16="http://schemas.microsoft.com/office/drawing/2014/main" id="{34D630A4-E69B-0AD2-751F-2B41DD96AFA6}"/>
+              </a:ext>
+            </a:extLst>
+          </p:cNvPr>
+          <p:cNvPicPr>
+            <a:picLocks noChangeAspect="1"/>
+          </p:cNvPicPr>
+          <p:nvPr/>
+        </p:nvPicPr>
+        <p:blipFill>
+          <a:blip r:embed="rId10">
+            <a:extLst>
+              <a:ext uri="{96DAC541-7B7A-43D3-8B79-37D633B846F1}">
+                <asvg:svgBlip xmlns:asvg="http://schemas.microsoft.com/office/drawing/2016/SVG/main" r:embed="rId11"/>
+              </a:ext>
+            </a:extLst>
+          </a:blip>
+          <a:stretch>
+            <a:fillRect/>
+          </a:stretch>
+        </p:blipFill>
+        <p:spPr>
+          <a:xfrm>
+            <a:off x="-161853" y="2535702"/>
+            <a:ext cx="1740627" cy="1740627"/>
+          </a:xfrm>
+          <a:prstGeom prst="rect">
+            <a:avLst/>
+          </a:prstGeom>
+        </p:spPr>
+      </p:pic>
+      <p:sp>
+        <p:nvSpPr>
+          <p:cNvPr id="31" name="TextBox 30">
+            <a:extLst>
+              <a:ext uri="{FF2B5EF4-FFF2-40B4-BE49-F238E27FC236}">
+                <a16:creationId xmlns:a16="http://schemas.microsoft.com/office/drawing/2014/main" id="{C2BC1FB4-919C-BDBE-528F-9145E9D76B80}"/>
+              </a:ext>
+            </a:extLst>
+          </p:cNvPr>
+          <p:cNvSpPr txBox="1"/>
+          <p:nvPr/>
+        </p:nvSpPr>
+        <p:spPr>
+          <a:xfrm>
+            <a:off x="35179" y="2102616"/>
+            <a:ext cx="1586119" cy="707886"/>
+          </a:xfrm>
+          <a:prstGeom prst="rect">
+            <a:avLst/>
+          </a:prstGeom>
+          <a:noFill/>
+        </p:spPr>
+        <p:txBody>
+          <a:bodyPr wrap="square" rtlCol="0">
+            <a:spAutoFit/>
+          </a:bodyPr>
+          <a:lstStyle/>
+          <a:p>
+            <a:pPr algn="ctr"/>
+            <a:r>
+              <a:rPr lang="en-AU" sz="2000" b="1" dirty="0"/>
+              <a:t>Musical Context</a:t>
+            </a:r>
+          </a:p>
+        </p:txBody>
+      </p:sp>
+      <p:sp>
+        <p:nvSpPr>
+          <p:cNvPr id="32" name="Arrow: Right 31">
+            <a:extLst>
+              <a:ext uri="{FF2B5EF4-FFF2-40B4-BE49-F238E27FC236}">
+                <a16:creationId xmlns:a16="http://schemas.microsoft.com/office/drawing/2014/main" id="{693858CE-3F90-ED70-BE92-D6B3826F7ABA}"/>
+              </a:ext>
+            </a:extLst>
+          </p:cNvPr>
+          <p:cNvSpPr/>
+          <p:nvPr/>
+        </p:nvSpPr>
+        <p:spPr>
+          <a:xfrm>
+            <a:off x="1356793" y="2903640"/>
+            <a:ext cx="468743" cy="367013"/>
+          </a:xfrm>
+          <a:prstGeom prst="rightArrow">
+            <a:avLst/>
+          </a:prstGeom>
+          <a:solidFill>
+            <a:schemeClr val="tx1"/>
+          </a:solidFill>
+          <a:ln>
+            <a:solidFill>
+              <a:schemeClr val="tx1"/>
+            </a:solidFill>
+          </a:ln>
+        </p:spPr>
+        <p:style>
+          <a:lnRef idx="2">
+            <a:schemeClr val="accent1">
+              <a:shade val="15000"/>
+            </a:schemeClr>
+          </a:lnRef>
+          <a:fillRef idx="1">
+            <a:schemeClr val="accent1"/>
+          </a:fillRef>
+          <a:effectRef idx="0">
+            <a:schemeClr val="accent1"/>
+          </a:effectRef>
+          <a:fontRef idx="minor">
+            <a:schemeClr val="lt1"/>
+          </a:fontRef>
+        </p:style>
+        <p:txBody>
+          <a:bodyPr rtlCol="0" anchor="ctr"/>
+          <a:lstStyle/>
+          <a:p>
+            <a:pPr algn="ctr"/>
+            <a:endParaRPr lang="en-AU"/>
+          </a:p>
+        </p:txBody>
+      </p:sp>
+      <p:sp>
+        <p:nvSpPr>
+          <p:cNvPr id="33" name="Arrow: Right 32">
+            <a:extLst>
+              <a:ext uri="{FF2B5EF4-FFF2-40B4-BE49-F238E27FC236}">
+                <a16:creationId xmlns:a16="http://schemas.microsoft.com/office/drawing/2014/main" id="{C90722C2-4B01-F718-9F30-F5C92E9BF0D5}"/>
+              </a:ext>
+            </a:extLst>
+          </p:cNvPr>
+          <p:cNvSpPr/>
+          <p:nvPr/>
+        </p:nvSpPr>
+        <p:spPr>
+          <a:xfrm>
+            <a:off x="6246849" y="2979625"/>
+            <a:ext cx="468743" cy="367013"/>
+          </a:xfrm>
+          <a:prstGeom prst="rightArrow">
+            <a:avLst/>
+          </a:prstGeom>
+          <a:solidFill>
+            <a:schemeClr val="tx1"/>
+          </a:solidFill>
+          <a:ln>
+            <a:solidFill>
+              <a:schemeClr val="tx1"/>
+            </a:solidFill>
+          </a:ln>
+        </p:spPr>
+        <p:style>
+          <a:lnRef idx="2">
+            <a:schemeClr val="accent1">
+              <a:shade val="15000"/>
+            </a:schemeClr>
+          </a:lnRef>
+          <a:fillRef idx="1">
+            <a:schemeClr val="accent1"/>
+          </a:fillRef>
+          <a:effectRef idx="0">
+            <a:schemeClr val="accent1"/>
+          </a:effectRef>
+          <a:fontRef idx="minor">
+            <a:schemeClr val="lt1"/>
+          </a:fontRef>
+        </p:style>
+        <p:txBody>
+          <a:bodyPr rtlCol="0" anchor="ctr"/>
+          <a:lstStyle/>
+          <a:p>
+            <a:pPr algn="ctr"/>
+            <a:endParaRPr lang="en-AU"/>
+          </a:p>
+        </p:txBody>
+      </p:sp>
+      <p:sp>
+        <p:nvSpPr>
+          <p:cNvPr id="34" name="Arrow: Right 33">
+            <a:extLst>
+              <a:ext uri="{FF2B5EF4-FFF2-40B4-BE49-F238E27FC236}">
+                <a16:creationId xmlns:a16="http://schemas.microsoft.com/office/drawing/2014/main" id="{7CB00B72-BCD1-612C-3672-1C693DA4D11E}"/>
+              </a:ext>
+            </a:extLst>
+          </p:cNvPr>
+          <p:cNvSpPr/>
+          <p:nvPr/>
+        </p:nvSpPr>
+        <p:spPr>
+          <a:xfrm>
+            <a:off x="8747378" y="2979625"/>
+            <a:ext cx="468743" cy="367013"/>
+          </a:xfrm>
+          <a:prstGeom prst="rightArrow">
+            <a:avLst/>
+          </a:prstGeom>
+          <a:solidFill>
+            <a:schemeClr val="tx1"/>
+          </a:solidFill>
+          <a:ln>
+            <a:solidFill>
+              <a:schemeClr val="tx1"/>
+            </a:solidFill>
+          </a:ln>
+        </p:spPr>
+        <p:style>
+          <a:lnRef idx="2">
+            <a:schemeClr val="accent1">
+              <a:shade val="15000"/>
+            </a:schemeClr>
+          </a:lnRef>
+          <a:fillRef idx="1">
+            <a:schemeClr val="accent1"/>
+          </a:fillRef>
+          <a:effectRef idx="0">
+            <a:schemeClr val="accent1"/>
+          </a:effectRef>
+          <a:fontRef idx="minor">
+            <a:schemeClr val="lt1"/>
+          </a:fontRef>
+        </p:style>
+        <p:txBody>
+          <a:bodyPr rtlCol="0" anchor="ctr"/>
+          <a:lstStyle/>
+          <a:p>
+            <a:pPr algn="ctr"/>
+            <a:endParaRPr lang="en-AU"/>
+          </a:p>
+        </p:txBody>
+      </p:sp>
+      <p:sp>
+        <p:nvSpPr>
+          <p:cNvPr id="35" name="Arrow: Right 34">
+            <a:extLst>
+              <a:ext uri="{FF2B5EF4-FFF2-40B4-BE49-F238E27FC236}">
+                <a16:creationId xmlns:a16="http://schemas.microsoft.com/office/drawing/2014/main" id="{AFAD2754-C176-3B9D-3DD8-01B03C4CB604}"/>
+              </a:ext>
+            </a:extLst>
+          </p:cNvPr>
+          <p:cNvSpPr/>
+          <p:nvPr/>
+        </p:nvSpPr>
+        <p:spPr>
+          <a:xfrm>
+            <a:off x="10378491" y="2983623"/>
+            <a:ext cx="468743" cy="367013"/>
+          </a:xfrm>
+          <a:prstGeom prst="rightArrow">
+            <a:avLst/>
+          </a:prstGeom>
+          <a:solidFill>
+            <a:schemeClr val="tx1"/>
+          </a:solidFill>
+          <a:ln>
+            <a:solidFill>
+              <a:schemeClr val="tx1"/>
+            </a:solidFill>
+          </a:ln>
+        </p:spPr>
+        <p:style>
+          <a:lnRef idx="2">
+            <a:schemeClr val="accent1">
+              <a:shade val="15000"/>
+            </a:schemeClr>
+          </a:lnRef>
+          <a:fillRef idx="1">
+            <a:schemeClr val="accent1"/>
+          </a:fillRef>
+          <a:effectRef idx="0">
+            <a:schemeClr val="accent1"/>
+          </a:effectRef>
+          <a:fontRef idx="minor">
+            <a:schemeClr val="lt1"/>
+          </a:fontRef>
+        </p:style>
+        <p:txBody>
+          <a:bodyPr rtlCol="0" anchor="ctr"/>
+          <a:lstStyle/>
+          <a:p>
+            <a:pPr algn="ctr"/>
+            <a:endParaRPr lang="en-AU"/>
+          </a:p>
+        </p:txBody>
+      </p:sp>
+      <p:sp>
+        <p:nvSpPr>
+          <p:cNvPr id="37" name="TextBox 36">
+            <a:extLst>
+              <a:ext uri="{FF2B5EF4-FFF2-40B4-BE49-F238E27FC236}">
+                <a16:creationId xmlns:a16="http://schemas.microsoft.com/office/drawing/2014/main" id="{D4AC033A-359D-F4EC-4083-74DDA689AF9B}"/>
+              </a:ext>
+            </a:extLst>
+          </p:cNvPr>
+          <p:cNvSpPr txBox="1"/>
+          <p:nvPr/>
+        </p:nvSpPr>
+        <p:spPr>
+          <a:xfrm>
+            <a:off x="10640967" y="2119354"/>
+            <a:ext cx="1279345" cy="707886"/>
+          </a:xfrm>
+          <a:prstGeom prst="rect">
+            <a:avLst/>
+          </a:prstGeom>
+          <a:noFill/>
+        </p:spPr>
+        <p:txBody>
+          <a:bodyPr wrap="square" rtlCol="0">
+            <a:spAutoFit/>
+          </a:bodyPr>
+          <a:lstStyle/>
+          <a:p>
+            <a:pPr algn="ctr"/>
+            <a:r>
+              <a:rPr lang="en-AU" sz="2000" b="1" dirty="0"/>
+              <a:t>Note</a:t>
+            </a:r>
+            <a:br>
+              <a:rPr lang="en-AU" sz="2000" b="1" dirty="0"/>
+            </a:br>
+            <a:r>
+              <a:rPr lang="en-AU" sz="2000" b="1" dirty="0"/>
+              <a:t>Choice</a:t>
+            </a:r>
+          </a:p>
+        </p:txBody>
+      </p:sp>
+      <p:pic>
+        <p:nvPicPr>
+          <p:cNvPr id="2" name="Graphic 1">
+            <a:extLst>
+              <a:ext uri="{FF2B5EF4-FFF2-40B4-BE49-F238E27FC236}">
+                <a16:creationId xmlns:a16="http://schemas.microsoft.com/office/drawing/2014/main" id="{E675DE75-BF85-0E72-A711-F14D54A7D734}"/>
               </a:ext>
             </a:extLst>
           </p:cNvPr>
@@ -4613,271 +4862,20 @@
         </p:blipFill>
         <p:spPr>
           <a:xfrm>
-            <a:off x="-161853" y="2535702"/>
-            <a:ext cx="1740627" cy="1740627"/>
+            <a:off x="8152094" y="2535702"/>
+            <a:ext cx="365095" cy="200801"/>
           </a:xfrm>
           <a:prstGeom prst="rect">
             <a:avLst/>
           </a:prstGeom>
         </p:spPr>
       </p:pic>
-      <p:sp>
-        <p:nvSpPr>
-          <p:cNvPr id="31" name="TextBox 30">
-            <a:extLst>
-              <a:ext uri="{FF2B5EF4-FFF2-40B4-BE49-F238E27FC236}">
-                <a16:creationId xmlns:a16="http://schemas.microsoft.com/office/drawing/2014/main" id="{C2BC1FB4-919C-BDBE-528F-9145E9D76B80}"/>
-              </a:ext>
-            </a:extLst>
-          </p:cNvPr>
-          <p:cNvSpPr txBox="1"/>
-          <p:nvPr/>
-        </p:nvSpPr>
-        <p:spPr>
-          <a:xfrm>
-            <a:off x="35179" y="2102616"/>
-            <a:ext cx="1586119" cy="707886"/>
-          </a:xfrm>
-          <a:prstGeom prst="rect">
-            <a:avLst/>
-          </a:prstGeom>
-          <a:noFill/>
-        </p:spPr>
-        <p:txBody>
-          <a:bodyPr wrap="square" rtlCol="0">
-            <a:spAutoFit/>
-          </a:bodyPr>
-          <a:lstStyle/>
-          <a:p>
-            <a:pPr algn="ctr"/>
-            <a:r>
-              <a:rPr lang="en-AU" sz="2000" b="1" dirty="0">
-                <a:solidFill>
-                  <a:schemeClr val="tx2">
-                    <a:lumMod val="90000"/>
-                    <a:lumOff val="10000"/>
-                  </a:schemeClr>
-                </a:solidFill>
-              </a:rPr>
-              <a:t>Musical Context</a:t>
-            </a:r>
-          </a:p>
-        </p:txBody>
-      </p:sp>
-      <p:sp>
-        <p:nvSpPr>
-          <p:cNvPr id="32" name="Arrow: Right 31">
-            <a:extLst>
-              <a:ext uri="{FF2B5EF4-FFF2-40B4-BE49-F238E27FC236}">
-                <a16:creationId xmlns:a16="http://schemas.microsoft.com/office/drawing/2014/main" id="{693858CE-3F90-ED70-BE92-D6B3826F7ABA}"/>
-              </a:ext>
-            </a:extLst>
-          </p:cNvPr>
-          <p:cNvSpPr/>
-          <p:nvPr/>
-        </p:nvSpPr>
-        <p:spPr>
-          <a:xfrm>
-            <a:off x="1356793" y="2903640"/>
-            <a:ext cx="468743" cy="367013"/>
-          </a:xfrm>
-          <a:prstGeom prst="rightArrow">
-            <a:avLst/>
-          </a:prstGeom>
-          <a:solidFill>
-            <a:schemeClr val="tx2">
-              <a:lumMod val="90000"/>
-              <a:lumOff val="10000"/>
-            </a:schemeClr>
-          </a:solidFill>
-        </p:spPr>
-        <p:style>
-          <a:lnRef idx="2">
-            <a:schemeClr val="accent1">
-              <a:shade val="15000"/>
-            </a:schemeClr>
-          </a:lnRef>
-          <a:fillRef idx="1">
-            <a:schemeClr val="accent1"/>
-          </a:fillRef>
-          <a:effectRef idx="0">
-            <a:schemeClr val="accent1"/>
-          </a:effectRef>
-          <a:fontRef idx="minor">
-            <a:schemeClr val="lt1"/>
-          </a:fontRef>
-        </p:style>
-        <p:txBody>
-          <a:bodyPr rtlCol="0" anchor="ctr"/>
-          <a:lstStyle/>
-          <a:p>
-            <a:pPr algn="ctr"/>
-            <a:endParaRPr lang="en-AU"/>
-          </a:p>
-        </p:txBody>
-      </p:sp>
-      <p:sp>
-        <p:nvSpPr>
-          <p:cNvPr id="33" name="Arrow: Right 32">
-            <a:extLst>
-              <a:ext uri="{FF2B5EF4-FFF2-40B4-BE49-F238E27FC236}">
-                <a16:creationId xmlns:a16="http://schemas.microsoft.com/office/drawing/2014/main" id="{C90722C2-4B01-F718-9F30-F5C92E9BF0D5}"/>
-              </a:ext>
-            </a:extLst>
-          </p:cNvPr>
-          <p:cNvSpPr/>
-          <p:nvPr/>
-        </p:nvSpPr>
-        <p:spPr>
-          <a:xfrm>
-            <a:off x="6246849" y="2979625"/>
-            <a:ext cx="468743" cy="367013"/>
-          </a:xfrm>
-          <a:prstGeom prst="rightArrow">
-            <a:avLst/>
-          </a:prstGeom>
-          <a:solidFill>
-            <a:schemeClr val="tx2">
-              <a:lumMod val="90000"/>
-              <a:lumOff val="10000"/>
-            </a:schemeClr>
-          </a:solidFill>
-        </p:spPr>
-        <p:style>
-          <a:lnRef idx="2">
-            <a:schemeClr val="accent1">
-              <a:shade val="15000"/>
-            </a:schemeClr>
-          </a:lnRef>
-          <a:fillRef idx="1">
-            <a:schemeClr val="accent1"/>
-          </a:fillRef>
-          <a:effectRef idx="0">
-            <a:schemeClr val="accent1"/>
-          </a:effectRef>
-          <a:fontRef idx="minor">
-            <a:schemeClr val="lt1"/>
-          </a:fontRef>
-        </p:style>
-        <p:txBody>
-          <a:bodyPr rtlCol="0" anchor="ctr"/>
-          <a:lstStyle/>
-          <a:p>
-            <a:pPr algn="ctr"/>
-            <a:endParaRPr lang="en-AU"/>
-          </a:p>
-        </p:txBody>
-      </p:sp>
-      <p:sp>
-        <p:nvSpPr>
-          <p:cNvPr id="34" name="Arrow: Right 33">
-            <a:extLst>
-              <a:ext uri="{FF2B5EF4-FFF2-40B4-BE49-F238E27FC236}">
-                <a16:creationId xmlns:a16="http://schemas.microsoft.com/office/drawing/2014/main" id="{7CB00B72-BCD1-612C-3672-1C693DA4D11E}"/>
-              </a:ext>
-            </a:extLst>
-          </p:cNvPr>
-          <p:cNvSpPr/>
-          <p:nvPr/>
-        </p:nvSpPr>
-        <p:spPr>
-          <a:xfrm>
-            <a:off x="8747378" y="2979625"/>
-            <a:ext cx="468743" cy="367013"/>
-          </a:xfrm>
-          <a:prstGeom prst="rightArrow">
-            <a:avLst/>
-          </a:prstGeom>
-          <a:solidFill>
-            <a:schemeClr val="tx2">
-              <a:lumMod val="90000"/>
-              <a:lumOff val="10000"/>
-            </a:schemeClr>
-          </a:solidFill>
-        </p:spPr>
-        <p:style>
-          <a:lnRef idx="2">
-            <a:schemeClr val="accent1">
-              <a:shade val="15000"/>
-            </a:schemeClr>
-          </a:lnRef>
-          <a:fillRef idx="1">
-            <a:schemeClr val="accent1"/>
-          </a:fillRef>
-          <a:effectRef idx="0">
-            <a:schemeClr val="accent1"/>
-          </a:effectRef>
-          <a:fontRef idx="minor">
-            <a:schemeClr val="lt1"/>
-          </a:fontRef>
-        </p:style>
-        <p:txBody>
-          <a:bodyPr rtlCol="0" anchor="ctr"/>
-          <a:lstStyle/>
-          <a:p>
-            <a:pPr algn="ctr"/>
-            <a:endParaRPr lang="en-AU"/>
-          </a:p>
-        </p:txBody>
-      </p:sp>
-      <p:sp>
-        <p:nvSpPr>
-          <p:cNvPr id="35" name="Arrow: Right 34">
-            <a:extLst>
-              <a:ext uri="{FF2B5EF4-FFF2-40B4-BE49-F238E27FC236}">
-                <a16:creationId xmlns:a16="http://schemas.microsoft.com/office/drawing/2014/main" id="{AFAD2754-C176-3B9D-3DD8-01B03C4CB604}"/>
-              </a:ext>
-            </a:extLst>
-          </p:cNvPr>
-          <p:cNvSpPr/>
-          <p:nvPr/>
-        </p:nvSpPr>
-        <p:spPr>
-          <a:xfrm>
-            <a:off x="10378491" y="2983623"/>
-            <a:ext cx="468743" cy="367013"/>
-          </a:xfrm>
-          <a:prstGeom prst="rightArrow">
-            <a:avLst/>
-          </a:prstGeom>
-          <a:solidFill>
-            <a:schemeClr val="tx2">
-              <a:lumMod val="90000"/>
-              <a:lumOff val="10000"/>
-            </a:schemeClr>
-          </a:solidFill>
-        </p:spPr>
-        <p:style>
-          <a:lnRef idx="2">
-            <a:schemeClr val="accent1">
-              <a:shade val="15000"/>
-            </a:schemeClr>
-          </a:lnRef>
-          <a:fillRef idx="1">
-            <a:schemeClr val="accent1"/>
-          </a:fillRef>
-          <a:effectRef idx="0">
-            <a:schemeClr val="accent1"/>
-          </a:effectRef>
-          <a:fontRef idx="minor">
-            <a:schemeClr val="lt1"/>
-          </a:fontRef>
-        </p:style>
-        <p:txBody>
-          <a:bodyPr rtlCol="0" anchor="ctr"/>
-          <a:lstStyle/>
-          <a:p>
-            <a:pPr algn="ctr"/>
-            <a:endParaRPr lang="en-AU"/>
-          </a:p>
-        </p:txBody>
-      </p:sp>
       <p:pic>
         <p:nvPicPr>
-          <p:cNvPr id="36" name="Graphic 35">
-            <a:extLst>
-              <a:ext uri="{FF2B5EF4-FFF2-40B4-BE49-F238E27FC236}">
-                <a16:creationId xmlns:a16="http://schemas.microsoft.com/office/drawing/2014/main" id="{163B5F82-416A-3950-E2A6-316EF1789C71}"/>
+          <p:cNvPr id="3" name="Graphic 2">
+            <a:extLst>
+              <a:ext uri="{FF2B5EF4-FFF2-40B4-BE49-F238E27FC236}">
+                <a16:creationId xmlns:a16="http://schemas.microsoft.com/office/drawing/2014/main" id="{82C464BC-AECC-E9A9-FB80-EF54C0F2F626}"/>
               </a:ext>
             </a:extLst>
           </p:cNvPr>
@@ -4887,10 +4885,10 @@
           <p:nvPr/>
         </p:nvPicPr>
         <p:blipFill>
-          <a:blip r:embed="rId4">
+          <a:blip r:embed="rId6">
             <a:extLst>
               <a:ext uri="{96DAC541-7B7A-43D3-8B79-37D633B846F1}">
-                <asvg:svgBlip xmlns:asvg="http://schemas.microsoft.com/office/drawing/2016/SVG/main" r:embed="rId5"/>
+                <asvg:svgBlip xmlns:asvg="http://schemas.microsoft.com/office/drawing/2016/SVG/main" r:embed="rId7"/>
               </a:ext>
             </a:extLst>
           </a:blip>
@@ -4900,78 +4898,14 @@
         </p:blipFill>
         <p:spPr>
           <a:xfrm>
-            <a:off x="11074625" y="2903640"/>
-            <a:ext cx="434488" cy="1216562"/>
+            <a:off x="10685727" y="2787998"/>
+            <a:ext cx="1224867" cy="1224867"/>
           </a:xfrm>
           <a:prstGeom prst="rect">
             <a:avLst/>
           </a:prstGeom>
         </p:spPr>
       </p:pic>
-      <p:sp>
-        <p:nvSpPr>
-          <p:cNvPr id="37" name="TextBox 36">
-            <a:extLst>
-              <a:ext uri="{FF2B5EF4-FFF2-40B4-BE49-F238E27FC236}">
-                <a16:creationId xmlns:a16="http://schemas.microsoft.com/office/drawing/2014/main" id="{D4AC033A-359D-F4EC-4083-74DDA689AF9B}"/>
-              </a:ext>
-            </a:extLst>
-          </p:cNvPr>
-          <p:cNvSpPr txBox="1"/>
-          <p:nvPr/>
-        </p:nvSpPr>
-        <p:spPr>
-          <a:xfrm>
-            <a:off x="10640967" y="2119354"/>
-            <a:ext cx="1279345" cy="707886"/>
-          </a:xfrm>
-          <a:prstGeom prst="rect">
-            <a:avLst/>
-          </a:prstGeom>
-          <a:noFill/>
-        </p:spPr>
-        <p:txBody>
-          <a:bodyPr wrap="square" rtlCol="0">
-            <a:spAutoFit/>
-          </a:bodyPr>
-          <a:lstStyle/>
-          <a:p>
-            <a:pPr algn="ctr"/>
-            <a:r>
-              <a:rPr lang="en-AU" sz="2000" b="1" dirty="0">
-                <a:solidFill>
-                  <a:schemeClr val="tx2">
-                    <a:lumMod val="90000"/>
-                    <a:lumOff val="10000"/>
-                  </a:schemeClr>
-                </a:solidFill>
-              </a:rPr>
-              <a:t>Note</a:t>
-            </a:r>
-            <a:br>
-              <a:rPr lang="en-AU" sz="2000" b="1" dirty="0">
-                <a:solidFill>
-                  <a:schemeClr val="tx2">
-                    <a:lumMod val="90000"/>
-                    <a:lumOff val="10000"/>
-                  </a:schemeClr>
-                </a:solidFill>
-              </a:rPr>
-            </a:br>
-            <a:r>
-              <a:rPr lang="en-AU" sz="2000" b="1" dirty="0">
-                <a:solidFill>
-                  <a:schemeClr val="tx2">
-                    <a:lumMod val="90000"/>
-                    <a:lumOff val="10000"/>
-                  </a:schemeClr>
-                </a:solidFill>
-              </a:rPr>
-              <a:t>Choice</a:t>
-            </a:r>
-          </a:p>
-        </p:txBody>
-      </p:sp>
     </p:spTree>
     <p:extLst>
       <p:ext uri="{BB962C8B-B14F-4D97-AF65-F5344CB8AC3E}">
